--- a/docs/pitch/VayuDrishti_pitch.pptx
+++ b/docs/pitch/VayuDrishti_pitch.pptx
@@ -9666,7 +9666,7 @@
                 </a:solidFill>
                 <a:latin typeface="Calibri"/>
               </a:rPr>
-              <a:t>Hotspot Confidence 66 → ~84 (threshold 70): sensor 35 · satellite 25 · citizen 25 · weather 15</a:t>
+              <a:t>Hotspot Confidence 66 → about 80 (threshold 70): sensor 35 · satellite 25 · citizen 25 · weather 15</a:t>
             </a:r>
           </a:p>
         </p:txBody>
